--- a/submission/Medreach-Presentation-Final.pptx
+++ b/submission/Medreach-Presentation-Final.pptx
@@ -2470,7 +2470,7 @@
                 <a:ea typeface="Calibri" pitchFamily="34" charset="-122"/>
                 <a:cs typeface="Calibri" pitchFamily="34" charset="-120"/>
               </a:rPr>
-              <a:t>Live: medreach-wtne.onrender.com   |   github.com/prakharporwal518-collab/Medreach</a:t>
+              <a:t>Live: medreach-2.onrender.com   |   github.com/prakharporwal518-collab/Medreach</a:t>
             </a:r>
             <a:endParaRPr lang="en-US" sz="1200" dirty="0"/>
           </a:p>
@@ -3566,7 +3566,7 @@
                 <a:ea typeface="Calibri" pitchFamily="34" charset="-122"/>
                 <a:cs typeface="Calibri" pitchFamily="34" charset="-120"/>
               </a:rPr>
-              <a:t>medreach-wtne.onrender.com</a:t>
+              <a:t>medreach-2.onrender.com</a:t>
             </a:r>
             <a:pPr indent="0" marL="0">
               <a:buNone/>
@@ -4774,7 +4774,7 @@
                 <a:ea typeface="Calibri" pitchFamily="34" charset="-122"/>
                 <a:cs typeface="Calibri" pitchFamily="34" charset="-120"/>
               </a:rPr>
-              <a:t>medreach-wtne.onrender.com</a:t>
+              <a:t>medreach-2.onrender.com</a:t>
             </a:r>
             <a:endParaRPr lang="en-US" sz="1200" dirty="0"/>
           </a:p>
